--- a/에너지경제학/자원에너지경제학_Chapter_3 (석유).pptx
+++ b/에너지경제학/자원에너지경제학_Chapter_3 (석유).pptx
@@ -259,7 +259,7 @@
           <a:p>
             <a:fld id="{4A5E00EF-AEA4-43E2-9451-8F9C59A39471}" type="datetimeFigureOut">
               <a:rPr lang="ko-KR" altLang="en-US" smtClean="0"/>
-              <a:t>2026-08-28</a:t>
+              <a:t>2026-09-17</a:t>
             </a:fld>
             <a:endParaRPr lang="ko-KR" altLang="en-US"/>
           </a:p>
@@ -681,7 +681,7 @@
           <a:p>
             <a:fld id="{CD32C56F-BD27-4999-9E6D-D4EACE3DA9F4}" type="datetime1">
               <a:rPr lang="ko-KR" altLang="en-US" smtClean="0"/>
-              <a:t>2026-08-28</a:t>
+              <a:t>2026-09-17</a:t>
             </a:fld>
             <a:endParaRPr lang="ko-KR" altLang="en-US"/>
           </a:p>
@@ -895,7 +895,7 @@
           <a:p>
             <a:fld id="{8EF4A19C-72C8-45CA-8E3F-68A7FA345D6C}" type="datetime1">
               <a:rPr lang="ko-KR" altLang="en-US" smtClean="0"/>
-              <a:t>2026-08-28</a:t>
+              <a:t>2026-09-17</a:t>
             </a:fld>
             <a:endParaRPr lang="ko-KR" altLang="en-US"/>
           </a:p>
@@ -1119,7 +1119,7 @@
           <a:p>
             <a:fld id="{56A175B2-010B-4341-954C-5F8F5C70B124}" type="datetime1">
               <a:rPr lang="ko-KR" altLang="en-US" smtClean="0"/>
-              <a:t>2026-08-28</a:t>
+              <a:t>2026-09-17</a:t>
             </a:fld>
             <a:endParaRPr lang="ko-KR" altLang="en-US"/>
           </a:p>
@@ -1333,7 +1333,7 @@
           <a:p>
             <a:fld id="{16B83F9E-22C9-45CA-9E85-070F1D3EF530}" type="datetime1">
               <a:rPr lang="ko-KR" altLang="en-US" smtClean="0"/>
-              <a:t>2026-08-28</a:t>
+              <a:t>2026-09-17</a:t>
             </a:fld>
             <a:endParaRPr lang="ko-KR" altLang="en-US"/>
           </a:p>
@@ -1624,7 +1624,7 @@
           <a:p>
             <a:fld id="{03278F45-FB3C-4C4D-B89A-7BC3F5F229F6}" type="datetime1">
               <a:rPr lang="ko-KR" altLang="en-US" smtClean="0"/>
-              <a:t>2026-08-28</a:t>
+              <a:t>2026-09-17</a:t>
             </a:fld>
             <a:endParaRPr lang="ko-KR" altLang="en-US"/>
           </a:p>
@@ -2017,7 +2017,7 @@
           <a:p>
             <a:fld id="{38FDAC3C-35A6-415C-9F03-738A6AC328B1}" type="datetime1">
               <a:rPr lang="ko-KR" altLang="en-US" smtClean="0"/>
-              <a:t>2026-08-28</a:t>
+              <a:t>2026-09-17</a:t>
             </a:fld>
             <a:endParaRPr lang="ko-KR" altLang="en-US"/>
           </a:p>
@@ -3611,7 +3611,7 @@
           <a:p>
             <a:fld id="{507A0DF1-AEE6-4B0D-89D2-351E7B3EF65C}" type="datetime1">
               <a:rPr lang="ko-KR" altLang="en-US" smtClean="0"/>
-              <a:t>2026-08-28</a:t>
+              <a:t>2026-09-17</a:t>
             </a:fld>
             <a:endParaRPr lang="ko-KR" altLang="en-US"/>
           </a:p>
@@ -4039,7 +4039,7 @@
           <a:p>
             <a:fld id="{CA93B8C9-630F-4D57-944D-04FD37CECCD3}" type="datetime1">
               <a:rPr lang="ko-KR" altLang="en-US" smtClean="0"/>
-              <a:t>2026-08-28</a:t>
+              <a:t>2026-09-17</a:t>
             </a:fld>
             <a:endParaRPr lang="ko-KR" altLang="en-US"/>
           </a:p>
@@ -4196,7 +4196,7 @@
           <a:p>
             <a:fld id="{E986165A-AC43-4902-9541-874ECD310BA3}" type="datetime1">
               <a:rPr lang="ko-KR" altLang="en-US" smtClean="0"/>
-              <a:t>2026-08-28</a:t>
+              <a:t>2026-09-17</a:t>
             </a:fld>
             <a:endParaRPr lang="ko-KR" altLang="en-US"/>
           </a:p>
@@ -4523,7 +4523,7 @@
           <a:p>
             <a:fld id="{47E6EE6D-2B0E-43A9-87A2-7354CDB998F4}" type="datetime1">
               <a:rPr lang="ko-KR" altLang="en-US" smtClean="0"/>
-              <a:t>2026-08-28</a:t>
+              <a:t>2026-09-17</a:t>
             </a:fld>
             <a:endParaRPr lang="ko-KR" altLang="en-US"/>
           </a:p>
@@ -4827,7 +4827,7 @@
           <a:p>
             <a:fld id="{5CC5944E-0BC8-4FAA-9F94-6B4B05834E10}" type="datetime1">
               <a:rPr lang="ko-KR" altLang="en-US" smtClean="0"/>
-              <a:t>2026-08-28</a:t>
+              <a:t>2026-09-17</a:t>
             </a:fld>
             <a:endParaRPr lang="ko-KR" altLang="en-US"/>
           </a:p>
@@ -7486,15 +7486,7 @@
             </a:pPr>
             <a:r>
               <a:rPr lang="ko-KR" altLang="en-US" sz="1600" spc="-50" dirty="0"/>
-              <a:t>스탠다드 오일의 해체 이후에도 </a:t>
-            </a:r>
-            <a:r>
-              <a:rPr lang="ko-KR" altLang="en-US" sz="1600" spc="-50" dirty="0" err="1"/>
-              <a:t>그영향력은</a:t>
-            </a:r>
-            <a:r>
-              <a:rPr lang="ko-KR" altLang="en-US" sz="1600" spc="-50" dirty="0"/>
-              <a:t> 사라지지 않았다</a:t>
+              <a:t>스탠다드 오일의 해체 이후에도 그 영향력은 사라지지 않았다</a:t>
             </a:r>
             <a:r>
               <a:rPr lang="en-US" altLang="ko-KR" sz="1600" spc="-50" dirty="0"/>
@@ -7511,7 +7503,7 @@
             </a:pPr>
             <a:r>
               <a:rPr lang="ko-KR" altLang="en-US" sz="1600" spc="-50" dirty="0"/>
-              <a:t>엑슨</a:t>
+              <a:t>분할된 기업들은 엑슨</a:t>
             </a:r>
             <a:r>
               <a:rPr lang="en-US" altLang="ko-KR" sz="1600" spc="-50" dirty="0"/>
@@ -7641,17 +7633,12 @@
             </a:pPr>
             <a:r>
               <a:rPr lang="ko-KR" altLang="en-US" sz="1600" spc="-50" dirty="0"/>
-              <a:t>또한 미국 및 세계 각국의 반독점 정책과 대기업 규제 논의의 중요한 </a:t>
-            </a:r>
-            <a:r>
-              <a:rPr lang="ko-KR" altLang="en-US" sz="1600" spc="-50"/>
-              <a:t>선례가 되었다</a:t>
-            </a:r>
-            <a:r>
-              <a:rPr lang="en-US" altLang="ko-KR" sz="1600" spc="-50"/>
+              <a:t>또한 미국 및 세계 각국의 반독점 정책과 대기업 규제 논의의 중요한 선례가 되었다</a:t>
+            </a:r>
+            <a:r>
+              <a:rPr lang="en-US" altLang="ko-KR" sz="1600" spc="-50" dirty="0"/>
               <a:t>.</a:t>
             </a:r>
-            <a:endParaRPr lang="en-US" altLang="ko-KR" sz="1600" spc="-50" dirty="0"/>
           </a:p>
         </p:txBody>
       </p:sp>
@@ -8075,7 +8062,23 @@
             </a:r>
             <a:r>
               <a:rPr lang="en-US" altLang="ko-KR" sz="1600" spc="-50" dirty="0"/>
-              <a:t>(Texaco)</a:t>
+              <a:t>(Texaco) </a:t>
+            </a:r>
+            <a:r>
+              <a:rPr lang="ko-KR" altLang="en-US" sz="1600" spc="-50" dirty="0"/>
+              <a:t>등이 포함되었다</a:t>
+            </a:r>
+            <a:r>
+              <a:rPr lang="en-US" altLang="ko-KR" sz="1600" spc="-50" dirty="0"/>
+              <a:t>. (7</a:t>
+            </a:r>
+            <a:r>
+              <a:rPr lang="ko-KR" altLang="en-US" sz="1600" spc="-50" dirty="0"/>
+              <a:t>공주라 부른다</a:t>
+            </a:r>
+            <a:r>
+              <a:rPr lang="en-US" altLang="ko-KR" sz="1600" spc="-50" dirty="0"/>
+              <a:t>)</a:t>
             </a:r>
           </a:p>
           <a:p>
@@ -8641,7 +8644,7 @@
         <p:spPr>
           <a:xfrm>
             <a:off x="288790" y="958844"/>
-            <a:ext cx="11118453" cy="4892173"/>
+            <a:ext cx="11118453" cy="5261505"/>
           </a:xfrm>
           <a:prstGeom prst="rect">
             <a:avLst/>
@@ -8870,7 +8873,15 @@
             </a:r>
             <a:r>
               <a:rPr lang="ko-KR" altLang="en-US" sz="1600" spc="-50" dirty="0"/>
-              <a:t>규모의 경제를 실현하고자 기업들은 생산설비를 최대한 활용하고자 하였다</a:t>
+              <a:t>규모의 경제를 실현하고자 기업들은 생산설비를 최대한 활용하려는 경향이 강하여</a:t>
+            </a:r>
+            <a:r>
+              <a:rPr lang="en-US" altLang="ko-KR" sz="1600" spc="-50" dirty="0"/>
+              <a:t>, </a:t>
+            </a:r>
+            <a:r>
+              <a:rPr lang="ko-KR" altLang="en-US" sz="1600" spc="-50" dirty="0"/>
+              <a:t>시장의 구조적 공급과잉을 반복적으로 초래하고 있었다</a:t>
             </a:r>
             <a:r>
               <a:rPr lang="en-US" altLang="ko-KR" sz="1600" spc="-50" dirty="0"/>
@@ -8939,7 +8950,7 @@
             </a:pPr>
             <a:r>
               <a:rPr lang="ko-KR" altLang="en-US" sz="1600" spc="-50" dirty="0"/>
-              <a:t>외국회사가 독점하던 유준 운영에 대한 조세감면을 축소하고</a:t>
+              <a:t>외국회사가 독점하던 유전 운영에 대한 조세감면을 축소하고</a:t>
             </a:r>
             <a:r>
               <a:rPr lang="en-US" altLang="ko-KR" sz="1600" spc="-50" dirty="0"/>
@@ -9160,7 +9171,27 @@
             </a:r>
             <a:r>
               <a:rPr lang="ko-KR" altLang="en-US" sz="1600" spc="-50" dirty="0"/>
-              <a:t> 전쟁 이후 급격히 상승하였다</a:t>
+              <a:t> 전쟁 </a:t>
+            </a:r>
+            <a:r>
+              <a:rPr lang="en-US" altLang="ko-KR" sz="1600" spc="-50" dirty="0"/>
+              <a:t>(4</a:t>
+            </a:r>
+            <a:r>
+              <a:rPr lang="ko-KR" altLang="en-US" sz="1600" spc="-50" dirty="0"/>
+              <a:t>차 중동전쟁</a:t>
+            </a:r>
+            <a:r>
+              <a:rPr lang="en-US" altLang="ko-KR" sz="1600" spc="-50"/>
+              <a:t>)</a:t>
+            </a:r>
+            <a:r>
+              <a:rPr lang="ko-KR" altLang="en-US" sz="1600" spc="-50"/>
+              <a:t> </a:t>
+            </a:r>
+            <a:r>
+              <a:rPr lang="ko-KR" altLang="en-US" sz="1600" spc="-50" dirty="0"/>
+              <a:t>이후 급격히 상승하였다</a:t>
             </a:r>
             <a:r>
               <a:rPr lang="en-US" altLang="ko-KR" sz="1600" spc="-50" dirty="0"/>
@@ -37790,7 +37821,23 @@
             </a:r>
             <a:r>
               <a:rPr lang="en-US" altLang="ko-KR" sz="1600" spc="-50" dirty="0"/>
-              <a:t>.</a:t>
+              <a:t>. (</a:t>
+            </a:r>
+            <a:r>
+              <a:rPr lang="ko-KR" altLang="en-US" sz="1600" spc="-50" dirty="0"/>
+              <a:t>기원전 </a:t>
+            </a:r>
+            <a:r>
+              <a:rPr lang="en-US" altLang="ko-KR" sz="1600" spc="-50" dirty="0"/>
+              <a:t>3,000-4,000</a:t>
+            </a:r>
+            <a:r>
+              <a:rPr lang="ko-KR" altLang="en-US" sz="1600" spc="-50" dirty="0"/>
+              <a:t>년 전</a:t>
+            </a:r>
+            <a:r>
+              <a:rPr lang="en-US" altLang="ko-KR" sz="1600" spc="-50" dirty="0"/>
+              <a:t>)</a:t>
             </a:r>
           </a:p>
           <a:p>
@@ -38657,6 +38704,88 @@
           </a:p>
         </p:txBody>
       </p:sp>
+      <p:pic>
+        <p:nvPicPr>
+          <p:cNvPr id="6" name="그림 5">
+            <a:extLst>
+              <a:ext uri="{FF2B5EF4-FFF2-40B4-BE49-F238E27FC236}">
+                <a16:creationId xmlns:a16="http://schemas.microsoft.com/office/drawing/2014/main" id="{E9287DEF-A535-C310-311D-E28971FF9527}"/>
+              </a:ext>
+            </a:extLst>
+          </p:cNvPr>
+          <p:cNvPicPr>
+            <a:picLocks noChangeAspect="1"/>
+          </p:cNvPicPr>
+          <p:nvPr/>
+        </p:nvPicPr>
+        <p:blipFill>
+          <a:blip r:embed="rId3"/>
+          <a:stretch>
+            <a:fillRect/>
+          </a:stretch>
+        </p:blipFill>
+        <p:spPr>
+          <a:xfrm>
+            <a:off x="6510532" y="5043821"/>
+            <a:ext cx="2381625" cy="1338413"/>
+          </a:xfrm>
+          <a:prstGeom prst="rect">
+            <a:avLst/>
+          </a:prstGeom>
+        </p:spPr>
+      </p:pic>
+      <p:sp>
+        <p:nvSpPr>
+          <p:cNvPr id="11" name="TextBox 10">
+            <a:extLst>
+              <a:ext uri="{FF2B5EF4-FFF2-40B4-BE49-F238E27FC236}">
+                <a16:creationId xmlns:a16="http://schemas.microsoft.com/office/drawing/2014/main" id="{62F9CB72-B7F0-DFA0-C4D4-2924EB3C1E43}"/>
+              </a:ext>
+            </a:extLst>
+          </p:cNvPr>
+          <p:cNvSpPr txBox="1"/>
+          <p:nvPr/>
+        </p:nvSpPr>
+        <p:spPr>
+          <a:xfrm>
+            <a:off x="6628451" y="4802225"/>
+            <a:ext cx="2610799" cy="261610"/>
+          </a:xfrm>
+          <a:prstGeom prst="rect">
+            <a:avLst/>
+          </a:prstGeom>
+          <a:noFill/>
+        </p:spPr>
+        <p:txBody>
+          <a:bodyPr wrap="square">
+            <a:spAutoFit/>
+          </a:bodyPr>
+          <a:lstStyle/>
+          <a:p>
+            <a:r>
+              <a:rPr lang="en-US" altLang="ko-KR" sz="1050" spc="-50" dirty="0"/>
+              <a:t>&lt;</a:t>
+            </a:r>
+            <a:r>
+              <a:rPr lang="ko-KR" altLang="en-US" sz="1050" spc="-50" dirty="0"/>
+              <a:t>크리스마스 트리 </a:t>
+            </a:r>
+            <a:r>
+              <a:rPr lang="en-US" altLang="ko-KR" sz="1050" spc="-50" dirty="0"/>
+              <a:t>(</a:t>
+            </a:r>
+            <a:r>
+              <a:rPr lang="ko-KR" altLang="en-US" sz="1050" spc="-50" dirty="0"/>
+              <a:t>석유 시추용</a:t>
+            </a:r>
+            <a:r>
+              <a:rPr lang="en-US" altLang="ko-KR" sz="1050" spc="-50" dirty="0"/>
+              <a:t>)&gt;</a:t>
+            </a:r>
+            <a:endParaRPr lang="ko-KR" altLang="en-US" sz="1050" dirty="0"/>
+          </a:p>
+        </p:txBody>
+      </p:sp>
     </p:spTree>
     <p:extLst>
       <p:ext uri="{BB962C8B-B14F-4D97-AF65-F5344CB8AC3E}">
@@ -38816,15 +38945,7 @@
             </a:r>
             <a:r>
               <a:rPr lang="ko-KR" altLang="en-US" sz="1600" spc="-50" dirty="0"/>
-              <a:t>송유관 인프라의 발전</a:t>
-            </a:r>
-            <a:r>
-              <a:rPr lang="en-US" altLang="ko-KR" sz="1600" spc="-50" dirty="0"/>
-              <a:t>, </a:t>
-            </a:r>
-            <a:r>
-              <a:rPr lang="ko-KR" altLang="en-US" sz="1600" spc="-50" dirty="0"/>
-              <a:t>크래킹 기술 도입 등은 석유의 생산</a:t>
+              <a:t>송유관 인프라의 발전 등은 석유의 생산</a:t>
             </a:r>
             <a:r>
               <a:rPr lang="en-US" altLang="ko-KR" sz="1600" spc="-50" dirty="0"/>
@@ -39228,7 +39349,7 @@
             </a:r>
             <a:r>
               <a:rPr lang="ko-KR" altLang="en-US" sz="1600" spc="-50" dirty="0"/>
-              <a:t>가 설립한 스탠드다 오일 회사 </a:t>
+              <a:t>가 설립한 스탠다드 오일 회사 </a:t>
             </a:r>
             <a:r>
               <a:rPr lang="en-US" altLang="ko-KR" sz="1600" spc="-50" dirty="0"/>
